--- a/Сайт по продаже ноутбуков.pptx
+++ b/Сайт по продаже ноутбуков.pptx
@@ -136,7 +136,7 @@
   <pc:docChgLst>
     <pc:chgData name="Максим Алябьев" userId="d68a461af1f0a1ed" providerId="LiveId" clId="{A042386F-6726-4694-88C9-882CAC8FC28C}"/>
     <pc:docChg chg="undo custSel addSld delSld modSld sldOrd">
-      <pc:chgData name="Максим Алябьев" userId="d68a461af1f0a1ed" providerId="LiveId" clId="{A042386F-6726-4694-88C9-882CAC8FC28C}" dt="2025-05-04T16:37:35.540" v="1762" actId="931"/>
+      <pc:chgData name="Максим Алябьев" userId="d68a461af1f0a1ed" providerId="LiveId" clId="{A042386F-6726-4694-88C9-882CAC8FC28C}" dt="2025-05-05T16:48:46.551" v="1764" actId="20577"/>
       <pc:docMkLst>
         <pc:docMk/>
       </pc:docMkLst>
@@ -379,13 +379,13 @@
         </pc:spChg>
       </pc:sldChg>
       <pc:sldChg chg="addSp delSp modSp new mod modClrScheme chgLayout">
-        <pc:chgData name="Максим Алябьев" userId="d68a461af1f0a1ed" providerId="LiveId" clId="{A042386F-6726-4694-88C9-882CAC8FC28C}" dt="2025-05-04T16:34:39.712" v="1495" actId="5793"/>
+        <pc:chgData name="Максим Алябьев" userId="d68a461af1f0a1ed" providerId="LiveId" clId="{A042386F-6726-4694-88C9-882CAC8FC28C}" dt="2025-05-05T16:48:46.551" v="1764" actId="20577"/>
         <pc:sldMkLst>
           <pc:docMk/>
           <pc:sldMk cId="1585574425" sldId="266"/>
         </pc:sldMkLst>
         <pc:spChg chg="mod ord">
-          <ac:chgData name="Максим Алябьев" userId="d68a461af1f0a1ed" providerId="LiveId" clId="{A042386F-6726-4694-88C9-882CAC8FC28C}" dt="2025-05-04T16:34:39.712" v="1495" actId="5793"/>
+          <ac:chgData name="Максим Алябьев" userId="d68a461af1f0a1ed" providerId="LiveId" clId="{A042386F-6726-4694-88C9-882CAC8FC28C}" dt="2025-05-05T16:48:46.551" v="1764" actId="20577"/>
           <ac:spMkLst>
             <pc:docMk/>
             <pc:sldMk cId="1585574425" sldId="266"/>
@@ -548,7 +548,7 @@
           <a:effectLst/>
           <a:extLst>
             <a:ext uri="{91240B29-F687-4f45-9708-019B960494DF}">
-              <a14:hiddenLine xmlns:a14="http://schemas.microsoft.com/office/drawing/2010/main" xmlns="" w="9525">
+              <a14:hiddenLine xmlns="" xmlns:a14="http://schemas.microsoft.com/office/drawing/2010/main" w="9525">
                 <a:solidFill>
                   <a:srgbClr val="000000"/>
                 </a:solidFill>
@@ -2070,7 +2070,7 @@
           <a:ln/>
           <a:extLst>
             <a:ext uri="{91240B29-F687-4f45-9708-019B960494DF}">
-              <a14:hiddenLine xmlns:a14="http://schemas.microsoft.com/office/drawing/2010/main" xmlns="" w="9525">
+              <a14:hiddenLine xmlns="" xmlns:a14="http://schemas.microsoft.com/office/drawing/2010/main" w="9525">
                 <a:solidFill>
                   <a:srgbClr val="000000"/>
                 </a:solidFill>
@@ -2345,7 +2345,7 @@
           <a:ln/>
           <a:extLst>
             <a:ext uri="{91240B29-F687-4f45-9708-019B960494DF}">
-              <a14:hiddenLine xmlns:a14="http://schemas.microsoft.com/office/drawing/2010/main" xmlns="" w="9525">
+              <a14:hiddenLine xmlns="" xmlns:a14="http://schemas.microsoft.com/office/drawing/2010/main" w="9525">
                 <a:solidFill>
                   <a:srgbClr val="000000"/>
                 </a:solidFill>
@@ -2628,7 +2628,7 @@
           <a:ln/>
           <a:extLst>
             <a:ext uri="{91240B29-F687-4f45-9708-019B960494DF}">
-              <a14:hiddenLine xmlns:a14="http://schemas.microsoft.com/office/drawing/2010/main" xmlns="" w="9525">
+              <a14:hiddenLine xmlns="" xmlns:a14="http://schemas.microsoft.com/office/drawing/2010/main" w="9525">
                 <a:solidFill>
                   <a:srgbClr val="000000"/>
                 </a:solidFill>
@@ -3254,7 +3254,7 @@
           <a:ln/>
           <a:extLst>
             <a:ext uri="{91240B29-F687-4f45-9708-019B960494DF}">
-              <a14:hiddenLine xmlns:a14="http://schemas.microsoft.com/office/drawing/2010/main" xmlns="" w="9525">
+              <a14:hiddenLine xmlns="" xmlns:a14="http://schemas.microsoft.com/office/drawing/2010/main" w="9525">
                 <a:solidFill>
                   <a:srgbClr val="000000"/>
                 </a:solidFill>
@@ -3598,7 +3598,7 @@
           <a:ln/>
           <a:extLst>
             <a:ext uri="{91240B29-F687-4f45-9708-019B960494DF}">
-              <a14:hiddenLine xmlns:a14="http://schemas.microsoft.com/office/drawing/2010/main" xmlns="" w="9525">
+              <a14:hiddenLine xmlns="" xmlns:a14="http://schemas.microsoft.com/office/drawing/2010/main" w="9525">
                 <a:solidFill>
                   <a:srgbClr val="000000"/>
                 </a:solidFill>
@@ -4080,7 +4080,7 @@
           <a:ln/>
           <a:extLst>
             <a:ext uri="{91240B29-F687-4f45-9708-019B960494DF}">
-              <a14:hiddenLine xmlns:a14="http://schemas.microsoft.com/office/drawing/2010/main" xmlns="" w="9525">
+              <a14:hiddenLine xmlns="" xmlns:a14="http://schemas.microsoft.com/office/drawing/2010/main" w="9525">
                 <a:solidFill>
                   <a:srgbClr val="000000"/>
                 </a:solidFill>
@@ -4509,7 +4509,7 @@
           <a:ln/>
           <a:extLst>
             <a:ext uri="{91240B29-F687-4f45-9708-019B960494DF}">
-              <a14:hiddenLine xmlns:a14="http://schemas.microsoft.com/office/drawing/2010/main" xmlns="" w="9525">
+              <a14:hiddenLine xmlns="" xmlns:a14="http://schemas.microsoft.com/office/drawing/2010/main" w="9525">
                 <a:solidFill>
                   <a:srgbClr val="000000"/>
                 </a:solidFill>
@@ -5834,13 +5834,13 @@
   <p:clrMapOvr>
     <a:masterClrMapping/>
   </p:clrMapOvr>
-  <mc:AlternateContent xmlns:mc="http://schemas.openxmlformats.org/markup-compatibility/2006">
-    <mc:Choice xmlns:p14="http://schemas.microsoft.com/office/powerpoint/2010/main" Requires="p14">
+  <mc:AlternateContent xmlns:mc="http://schemas.openxmlformats.org/markup-compatibility/2006" xmlns:p14="http://schemas.microsoft.com/office/powerpoint/2010/main">
+    <mc:Choice Requires="p14">
       <p:transition spd="med" p14:dur="700">
         <p:fade/>
       </p:transition>
     </mc:Choice>
-    <mc:Fallback>
+    <mc:Fallback xmlns="">
       <p:transition spd="med">
         <p:fade/>
       </p:transition>
@@ -6312,13 +6312,13 @@
   <p:clrMapOvr>
     <a:masterClrMapping/>
   </p:clrMapOvr>
-  <mc:AlternateContent xmlns:mc="http://schemas.openxmlformats.org/markup-compatibility/2006">
-    <mc:Choice xmlns:p14="http://schemas.microsoft.com/office/powerpoint/2010/main" Requires="p14">
+  <mc:AlternateContent xmlns:mc="http://schemas.openxmlformats.org/markup-compatibility/2006" xmlns:p14="http://schemas.microsoft.com/office/powerpoint/2010/main">
+    <mc:Choice Requires="p14">
       <p:transition p14:dur="100">
         <p:cut/>
       </p:transition>
     </mc:Choice>
-    <mc:Fallback>
+    <mc:Fallback xmlns="">
       <p:transition>
         <p:cut/>
       </p:transition>
@@ -6460,13 +6460,13 @@
   <p:clrMapOvr>
     <a:masterClrMapping/>
   </p:clrMapOvr>
-  <mc:AlternateContent xmlns:mc="http://schemas.openxmlformats.org/markup-compatibility/2006">
-    <mc:Choice xmlns:p159="http://schemas.microsoft.com/office/powerpoint/2015/09/main" Requires="p159">
+  <mc:AlternateContent xmlns:mc="http://schemas.openxmlformats.org/markup-compatibility/2006" xmlns:p159="http://schemas.microsoft.com/office/powerpoint/2015/09/main">
+    <mc:Choice Requires="p159">
       <p:transition xmlns:p14="http://schemas.microsoft.com/office/powerpoint/2010/main" spd="slow" p14:dur="2000">
         <p159:morph option="byObject"/>
       </p:transition>
     </mc:Choice>
-    <mc:Fallback>
+    <mc:Fallback xmlns="">
       <p:transition spd="slow">
         <p:fade/>
       </p:transition>
@@ -6735,13 +6735,13 @@
   <p:clrMapOvr>
     <a:masterClrMapping/>
   </p:clrMapOvr>
-  <mc:AlternateContent xmlns:mc="http://schemas.openxmlformats.org/markup-compatibility/2006">
-    <mc:Choice xmlns:p14="http://schemas.microsoft.com/office/powerpoint/2010/main" Requires="p14">
+  <mc:AlternateContent xmlns:mc="http://schemas.openxmlformats.org/markup-compatibility/2006" xmlns:p14="http://schemas.microsoft.com/office/powerpoint/2010/main">
+    <mc:Choice Requires="p14">
       <p:transition spd="slow" p14:dur="1500">
         <p:split orient="vert"/>
       </p:transition>
     </mc:Choice>
-    <mc:Fallback>
+    <mc:Fallback xmlns="">
       <p:transition spd="slow">
         <p:split orient="vert"/>
       </p:transition>
@@ -6939,13 +6939,13 @@
   <p:clrMapOvr>
     <a:masterClrMapping/>
   </p:clrMapOvr>
-  <mc:AlternateContent xmlns:mc="http://schemas.openxmlformats.org/markup-compatibility/2006">
-    <mc:Choice xmlns:p14="http://schemas.microsoft.com/office/powerpoint/2010/main" Requires="p14">
+  <mc:AlternateContent xmlns:mc="http://schemas.openxmlformats.org/markup-compatibility/2006" xmlns:p14="http://schemas.microsoft.com/office/powerpoint/2010/main">
+    <mc:Choice Requires="p14">
       <p:transition spd="slow" p14:dur="3400">
         <p14:reveal/>
       </p:transition>
     </mc:Choice>
-    <mc:Fallback>
+    <mc:Fallback xmlns="">
       <p:transition spd="slow">
         <p:fade/>
       </p:transition>
@@ -7353,13 +7353,13 @@
   <p:clrMapOvr>
     <a:masterClrMapping/>
   </p:clrMapOvr>
-  <mc:AlternateContent xmlns:mc="http://schemas.openxmlformats.org/markup-compatibility/2006">
-    <mc:Choice xmlns:p14="http://schemas.microsoft.com/office/powerpoint/2010/main" Requires="p14">
+  <mc:AlternateContent xmlns:mc="http://schemas.openxmlformats.org/markup-compatibility/2006" xmlns:p14="http://schemas.microsoft.com/office/powerpoint/2010/main">
+    <mc:Choice Requires="p14">
       <p:transition spd="slow" p14:dur="800">
         <p:circle/>
       </p:transition>
     </mc:Choice>
-    <mc:Fallback>
+    <mc:Fallback xmlns="">
       <p:transition spd="slow">
         <p:circle/>
       </p:transition>
@@ -7765,12 +7765,8 @@
           <a:lstStyle/>
           <a:p>
             <a:r>
-              <a:rPr lang="ru-RU" dirty="0" err="1"/>
-              <a:t>Собсьвенное</a:t>
-            </a:r>
-            <a:r>
-              <a:rPr lang="ru-RU" dirty="0"/>
-              <a:t> </a:t>
+              <a:rPr lang="ru-RU"/>
+              <a:t>Собственное </a:t>
             </a:r>
             <a:r>
               <a:rPr lang="en-US" dirty="0"/>
@@ -7855,13 +7851,13 @@
   <p:clrMapOvr>
     <a:masterClrMapping/>
   </p:clrMapOvr>
-  <mc:AlternateContent xmlns:mc="http://schemas.openxmlformats.org/markup-compatibility/2006">
-    <mc:Choice xmlns:p14="http://schemas.microsoft.com/office/powerpoint/2010/main" Requires="p14">
+  <mc:AlternateContent xmlns:mc="http://schemas.openxmlformats.org/markup-compatibility/2006" xmlns:p14="http://schemas.microsoft.com/office/powerpoint/2010/main">
+    <mc:Choice Requires="p14">
       <p:transition spd="slow" p14:dur="1500">
         <p:split orient="vert"/>
       </p:transition>
     </mc:Choice>
-    <mc:Fallback>
+    <mc:Fallback xmlns="">
       <p:transition spd="slow">
         <p:split orient="vert"/>
       </p:transition>
